--- a/docs/Apresentacao_Algoritmo_Genetico_Cancer_de_Mama.pptx
+++ b/docs/Apresentacao_Algoritmo_Genetico_Cancer_de_Mama.pptx
@@ -21,11 +21,6 @@
     <p:sldId id="269" r:id="rId20"/>
     <p:sldId id="270" r:id="rId21"/>
     <p:sldId id="271" r:id="rId22"/>
-    <p:sldId id="272" r:id="rId23"/>
-    <p:sldId id="273" r:id="rId24"/>
-    <p:sldId id="274" r:id="rId25"/>
-    <p:sldId id="275" r:id="rId26"/>
-    <p:sldId id="276" r:id="rId27"/>
   </p:sldIdLst>
   <p:sldSz cx="12191695" cy="6858000" type="screen4x3"/>
   <p:notesSz cx="6858000" cy="9144000"/>
@@ -3145,7 +3140,7 @@
           <a:lstStyle/>
           <a:p>
             <a:r>
-              <a:t>Tech Challenge Fase 2 | Machine Learning, otimizacao genetica e explicabilidade</a:t>
+              <a:t>Estudo com 4 modelos baseline e 12 execucoes de otimizacao genetica</a:t>
             </a:r>
           </a:p>
         </p:txBody>
@@ -3184,21 +3179,45 @@
           <a:lstStyle/>
           <a:p>
             <a:r>
-              <a:t>Hiperparametros Otimizados</a:t>
-            </a:r>
-          </a:p>
-        </p:txBody>
-      </p:sp>
-      <p:sp>
-        <p:nvSpPr>
-          <p:cNvPr id="3" name="TextBox 2"/>
+              <a:t>Comparacao Baseline x Otimizado</a:t>
+            </a:r>
+          </a:p>
+        </p:txBody>
+      </p:sp>
+      <p:pic>
+        <p:nvPicPr>
+          <p:cNvPr id="3" name="Picture 2" descr="comparacao_baseline_vs_otimizado.png"/>
+          <p:cNvPicPr>
+            <a:picLocks noChangeAspect="1"/>
+          </p:cNvPicPr>
+          <p:nvPr/>
+        </p:nvPicPr>
+        <p:blipFill>
+          <a:blip r:embed="rId2"/>
+          <a:stretch>
+            <a:fillRect/>
+          </a:stretch>
+        </p:blipFill>
+        <p:spPr>
+          <a:xfrm>
+            <a:off x="731520" y="1188720"/>
+            <a:ext cx="7680960" cy="2560320"/>
+          </a:xfrm>
+          <a:prstGeom prst="rect">
+            <a:avLst/>
+          </a:prstGeom>
+        </p:spPr>
+      </p:pic>
+      <p:sp>
+        <p:nvSpPr>
+          <p:cNvPr id="4" name="TextBox 3"/>
           <p:cNvSpPr txBox="1"/>
           <p:nvPr/>
         </p:nvSpPr>
         <p:spPr>
           <a:xfrm>
-            <a:off x="548640" y="1280160"/>
-            <a:ext cx="3840480" cy="4754880"/>
+            <a:off x="731520" y="6035040"/>
+            <a:ext cx="7680960" cy="457200"/>
           </a:xfrm>
           <a:prstGeom prst="rect">
             <a:avLst/>
@@ -3206,111 +3225,16 @@
           <a:noFill/>
         </p:spPr>
         <p:txBody>
-          <a:bodyPr wrap="square">
+          <a:bodyPr wrap="none">
             <a:spAutoFit/>
           </a:bodyPr>
           <a:lstStyle/>
           <a:p>
-            <a:pPr>
-              <a:defRPr b="1" sz="2400"/>
-            </a:pPr>
-            <a:r>
-              <a:t>Experimento 2</a:t>
-            </a:r>
-          </a:p>
-          <a:p>
-            <a:pPr>
-              <a:defRPr sz="1800"/>
-            </a:pPr>
-            <a:r>
-              <a:t>classifier__C = 0.1</a:t>
-            </a:r>
-          </a:p>
-          <a:p>
-            <a:pPr>
-              <a:defRPr sz="1800"/>
-            </a:pPr>
-            <a:r>
-              <a:t>classifier__solver = lbfgs</a:t>
-            </a:r>
-          </a:p>
-          <a:p>
-            <a:pPr>
-              <a:defRPr sz="1800"/>
-            </a:pPr>
-            <a:r>
-              <a:t>scaler__with_mean = True</a:t>
-            </a:r>
-          </a:p>
-          <a:p>
-            <a:pPr>
-              <a:defRPr sz="1800"/>
-            </a:pPr>
-            <a:r>
-              <a:t>scaler__with_std = True</a:t>
-            </a:r>
-          </a:p>
-        </p:txBody>
-      </p:sp>
-      <p:sp>
-        <p:nvSpPr>
-          <p:cNvPr id="4" name="TextBox 3"/>
-          <p:cNvSpPr txBox="1"/>
-          <p:nvPr/>
-        </p:nvSpPr>
-        <p:spPr>
-          <a:xfrm>
-            <a:off x="4572000" y="1280160"/>
-            <a:ext cx="3840480" cy="4754880"/>
-          </a:xfrm>
-          <a:prstGeom prst="rect">
-            <a:avLst/>
-          </a:prstGeom>
-          <a:noFill/>
-        </p:spPr>
-        <p:txBody>
-          <a:bodyPr wrap="square">
-            <a:spAutoFit/>
-          </a:bodyPr>
-          <a:lstStyle/>
-          <a:p>
-            <a:pPr>
-              <a:defRPr b="1" sz="2400"/>
-            </a:pPr>
-            <a:r>
-              <a:t>Leitura tecnica</a:t>
-            </a:r>
-          </a:p>
-          <a:p>
-            <a:pPr>
-              <a:defRPr sz="1800"/>
-            </a:pPr>
-            <a:r>
-              <a:t>Melhor equilibrio no conjunto de teste.</a:t>
-            </a:r>
-          </a:p>
-          <a:p>
-            <a:pPr>
-              <a:defRPr sz="1800"/>
-            </a:pPr>
-            <a:r>
-              <a:t>Recall = 97.62%</a:t>
-            </a:r>
-          </a:p>
-          <a:p>
-            <a:pPr>
-              <a:defRPr sz="1800"/>
-            </a:pPr>
-            <a:r>
-              <a:t>Especificidade = 100.00%</a:t>
-            </a:r>
-          </a:p>
-          <a:p>
-            <a:pPr>
-              <a:defRPr sz="1800"/>
-            </a:pPr>
-            <a:r>
-              <a:t>F1-score = 98.80%</a:t>
+            <a:pPr algn="ctr">
+              <a:defRPr sz="1400"/>
+            </a:pPr>
+            <a:r>
+              <a:t>Comparacao de recall, especificidade e F1-score para os quatro modelos.</a:t>
             </a:r>
           </a:p>
         </p:txBody>
@@ -3349,14 +3273,14 @@
           <a:lstStyle/>
           <a:p>
             <a:r>
-              <a:t>Comparacao Baseline x AG</a:t>
+              <a:t>Convergencia do KNN</a:t>
             </a:r>
           </a:p>
         </p:txBody>
       </p:sp>
       <p:pic>
         <p:nvPicPr>
-          <p:cNvPr id="3" name="Picture 2" descr="comparacao_experimentos.png"/>
+          <p:cNvPr id="3" name="Picture 2" descr="convergencia_KNeighborsClassifier_experimento_1_exploracao.png"/>
           <p:cNvPicPr>
             <a:picLocks noChangeAspect="1"/>
           </p:cNvPicPr>
@@ -3371,7 +3295,7 @@
         <p:spPr>
           <a:xfrm>
             <a:off x="731520" y="1188720"/>
-            <a:ext cx="7680960" cy="3840480"/>
+            <a:ext cx="7680960" cy="5486400"/>
           </a:xfrm>
           <a:prstGeom prst="rect">
             <a:avLst/>
@@ -3404,7 +3328,7 @@
               <a:defRPr sz="1400"/>
             </a:pPr>
             <a:r>
-              <a:t>Comparacao de recall, especificidade e F1-score no conjunto de teste.</a:t>
+              <a:t>O KNN foi a familia com ganho real de recall no conjunto de teste.</a:t>
             </a:r>
           </a:p>
         </p:txBody>
@@ -3443,14 +3367,14 @@
           <a:lstStyle/>
           <a:p>
             <a:r>
-              <a:t>Resumo dos Experimentos</a:t>
+              <a:t>Convergencia da Logistic Regression</a:t>
             </a:r>
           </a:p>
         </p:txBody>
       </p:sp>
       <p:pic>
         <p:nvPicPr>
-          <p:cNvPr id="3" name="Picture 2" descr="resumo_experimentos.png"/>
+          <p:cNvPr id="3" name="Picture 2" descr="convergencia_LogisticRegression_experimento_1_exploracao.png"/>
           <p:cNvPicPr>
             <a:picLocks noChangeAspect="1"/>
           </p:cNvPicPr>
@@ -3465,7 +3389,7 @@
         <p:spPr>
           <a:xfrm>
             <a:off x="731520" y="1188720"/>
-            <a:ext cx="7680960" cy="4608576"/>
+            <a:ext cx="7680960" cy="5486400"/>
           </a:xfrm>
           <a:prstGeom prst="rect">
             <a:avLst/>
@@ -3498,7 +3422,7 @@
               <a:defRPr sz="1400"/>
             </a:pPr>
             <a:r>
-              <a:t>Fitness final dos tres experimentos geneticos executados.</a:t>
+              <a:t>A regressao logistica mostrou estabilidade e confirmou uma regiao otima forte.</a:t>
             </a:r>
           </a:p>
         </p:txBody>
@@ -3537,14 +3461,14 @@
           <a:lstStyle/>
           <a:p>
             <a:r>
-              <a:t>Convergencia do AG</a:t>
+              <a:t>Convergencia do Random Forest</a:t>
             </a:r>
           </a:p>
         </p:txBody>
       </p:sp>
       <p:pic>
         <p:nvPicPr>
-          <p:cNvPr id="3" name="Picture 2" descr="convergencia_ag_experimento_2.png"/>
+          <p:cNvPr id="3" name="Picture 2" descr="convergencia_RandomForestClassifier_experimento_1_exploracao.png"/>
           <p:cNvPicPr>
             <a:picLocks noChangeAspect="1"/>
           </p:cNvPicPr>
@@ -3559,7 +3483,7 @@
         <p:spPr>
           <a:xfrm>
             <a:off x="731520" y="1188720"/>
-            <a:ext cx="7680960" cy="4608576"/>
+            <a:ext cx="7680960" cy="5486400"/>
           </a:xfrm>
           <a:prstGeom prst="rect">
             <a:avLst/>
@@ -3592,7 +3516,7 @@
               <a:defRPr sz="1400"/>
             </a:pPr>
             <a:r>
-              <a:t>Evolucao do fitness no experimento com melhor equilibrio no conjunto de teste.</a:t>
+              <a:t>O ganho em validacao nao se traduziu em melhoria de recall no teste.</a:t>
             </a:r>
           </a:p>
         </p:txBody>
@@ -3631,62 +3555,47 @@
           <a:lstStyle/>
           <a:p>
             <a:r>
-              <a:t>Fitness x Hiperparametros</a:t>
-            </a:r>
-          </a:p>
-        </p:txBody>
-      </p:sp>
-      <p:pic>
-        <p:nvPicPr>
-          <p:cNvPr id="3" name="Picture 2" descr="comportamento_hiperparametros.png"/>
-          <p:cNvPicPr>
-            <a:picLocks noChangeAspect="1"/>
-          </p:cNvPicPr>
-          <p:nvPr/>
-        </p:nvPicPr>
-        <p:blipFill>
-          <a:blip r:embed="rId2"/>
-          <a:stretch>
-            <a:fillRect/>
-          </a:stretch>
-        </p:blipFill>
-        <p:spPr>
-          <a:xfrm>
-            <a:off x="731520" y="1188720"/>
-            <a:ext cx="7680960" cy="4389120"/>
-          </a:xfrm>
-          <a:prstGeom prst="rect">
-            <a:avLst/>
-          </a:prstGeom>
-        </p:spPr>
-      </p:pic>
-      <p:sp>
-        <p:nvSpPr>
-          <p:cNvPr id="4" name="TextBox 3"/>
-          <p:cNvSpPr txBox="1"/>
-          <p:nvPr/>
-        </p:nvSpPr>
-        <p:spPr>
-          <a:xfrm>
-            <a:off x="731520" y="6035040"/>
-            <a:ext cx="7680960" cy="457200"/>
-          </a:xfrm>
-          <a:prstGeom prst="rect">
-            <a:avLst/>
-          </a:prstGeom>
-          <a:noFill/>
-        </p:spPr>
-        <p:txBody>
-          <a:bodyPr wrap="none">
-            <a:spAutoFit/>
-          </a:bodyPr>
-          <a:lstStyle/>
-          <a:p>
-            <a:pPr algn="ctr">
-              <a:defRPr sz="1400"/>
-            </a:pPr>
-            <a:r>
-              <a:t>Leitura do comportamento do fitness frente aos hiperparametros otimizados.</a:t>
+              <a:t>Analise Tecnica</a:t>
+            </a:r>
+          </a:p>
+        </p:txBody>
+      </p:sp>
+      <p:sp>
+        <p:nvSpPr>
+          <p:cNvPr id="3" name="Content Placeholder 2"/>
+          <p:cNvSpPr>
+            <a:spLocks noGrp="1"/>
+          </p:cNvSpPr>
+          <p:nvPr>
+            <p:ph idx="1"/>
+          </p:nvPr>
+        </p:nvSpPr>
+        <p:spPr/>
+        <p:txBody>
+          <a:bodyPr/>
+          <a:lstStyle/>
+          <a:p>
+            <a:pPr>
+              <a:defRPr sz="2200"/>
+            </a:pPr>
+            <a:r>
+              <a:t>Nem toda melhora de fitness em validacao gera ganho de recall no teste.</a:t>
+            </a:r>
+          </a:p>
+          <a:p>
+            <a:pPr>
+              <a:defRPr sz="2200"/>
+            </a:pPr>
+            <a:r>
+              <a:t>KNN foi o unico modelo com ganho real de sensibilidade.</a:t>
+            </a:r>
+          </a:p>
+          <a:p>
+            <a:pPr>
+              <a:defRPr sz="2200"/>
+            </a:pPr>
+            <a:r>
+              <a:t>LogisticRegression permaneceu como melhor recomendacao clinica geral.</a:t>
             </a:r>
           </a:p>
         </p:txBody>
@@ -3725,7 +3634,7 @@
           <a:lstStyle/>
           <a:p>
             <a:r>
-              <a:t>Leitura Parametros x Fitness</a:t>
+              <a:t>Infraestrutura e Operacao</a:t>
             </a:r>
           </a:p>
         </p:txBody>
@@ -3749,7 +3658,7 @@
               <a:defRPr sz="2200"/>
             </a:pPr>
             <a:r>
-              <a:t>Os tres experimentos convergiram para a mesma configuracao vencedora.</a:t>
+              <a:t>Interface em Streamlit, API em FastAPI e logging em arquivo.</a:t>
             </a:r>
           </a:p>
           <a:p>
@@ -3757,7 +3666,7 @@
               <a:defRPr sz="2200"/>
             </a:pPr>
             <a:r>
-              <a:t>O melhor fitness final foi 0,9712.</a:t>
+              <a:t>Persistencia de artefatos em JSON, JSONL e imagens.</a:t>
             </a:r>
           </a:p>
           <a:p>
@@ -3765,15 +3674,7 @@
               <a:defRPr sz="2200"/>
             </a:pPr>
             <a:r>
-              <a:t>A configuracao vencedora usou C=0.1 e solver=lbfgs.</a:t>
-            </a:r>
-          </a:p>
-          <a:p>
-            <a:pPr>
-              <a:defRPr sz="2200"/>
-            </a:pPr>
-            <a:r>
-              <a:t>A baixa variacao nos graficos reflete convergencia rapida para a mesma solucao.</a:t>
+              <a:t>Docker, docker-compose e estrutura inicial em Terraform.</a:t>
             </a:r>
           </a:p>
         </p:txBody>
@@ -3812,101 +3713,7 @@
           <a:lstStyle/>
           <a:p>
             <a:r>
-              <a:t>Metricas por Geracao</a:t>
-            </a:r>
-          </a:p>
-        </p:txBody>
-      </p:sp>
-      <p:pic>
-        <p:nvPicPr>
-          <p:cNvPr id="3" name="Picture 2" descr="metricas_por_geracao_ag_experimento_2.png"/>
-          <p:cNvPicPr>
-            <a:picLocks noChangeAspect="1"/>
-          </p:cNvPicPr>
-          <p:nvPr/>
-        </p:nvPicPr>
-        <p:blipFill>
-          <a:blip r:embed="rId2"/>
-          <a:stretch>
-            <a:fillRect/>
-          </a:stretch>
-        </p:blipFill>
-        <p:spPr>
-          <a:xfrm>
-            <a:off x="731520" y="1188720"/>
-            <a:ext cx="7680960" cy="4608576"/>
-          </a:xfrm>
-          <a:prstGeom prst="rect">
-            <a:avLst/>
-          </a:prstGeom>
-        </p:spPr>
-      </p:pic>
-      <p:sp>
-        <p:nvSpPr>
-          <p:cNvPr id="4" name="TextBox 3"/>
-          <p:cNvSpPr txBox="1"/>
-          <p:nvPr/>
-        </p:nvSpPr>
-        <p:spPr>
-          <a:xfrm>
-            <a:off x="731520" y="6035040"/>
-            <a:ext cx="7680960" cy="457200"/>
-          </a:xfrm>
-          <a:prstGeom prst="rect">
-            <a:avLst/>
-          </a:prstGeom>
-          <a:noFill/>
-        </p:spPr>
-        <p:txBody>
-          <a:bodyPr wrap="none">
-            <a:spAutoFit/>
-          </a:bodyPr>
-          <a:lstStyle/>
-          <a:p>
-            <a:pPr algn="ctr">
-              <a:defRPr sz="1400"/>
-            </a:pPr>
-            <a:r>
-              <a:t>Evolucao de recall, especificidade e F1 ao longo das geracoes.</a:t>
-            </a:r>
-          </a:p>
-        </p:txBody>
-      </p:sp>
-    </p:spTree>
-  </p:cSld>
-  <p:clrMapOvr>
-    <a:masterClrMapping/>
-  </p:clrMapOvr>
-</p:sld>
-</file>
-
-<file path=ppt/slides/slide17.xml><?xml version="1.0" encoding="utf-8"?>
-<p:sld xmlns:a="http://schemas.openxmlformats.org/drawingml/2006/main" xmlns:p="http://schemas.openxmlformats.org/presentationml/2006/main" xmlns:r="http://schemas.openxmlformats.org/officeDocument/2006/relationships">
-  <p:cSld>
-    <p:spTree>
-      <p:nvGrpSpPr>
-        <p:cNvPr id="1" name=""/>
-        <p:cNvGrpSpPr/>
-        <p:nvPr/>
-      </p:nvGrpSpPr>
-      <p:grpSpPr/>
-      <p:sp>
-        <p:nvSpPr>
-          <p:cNvPr id="2" name="Title 1"/>
-          <p:cNvSpPr>
-            <a:spLocks noGrp="1"/>
-          </p:cNvSpPr>
-          <p:nvPr>
-            <p:ph type="title"/>
-          </p:nvPr>
-        </p:nvSpPr>
-        <p:spPr/>
-        <p:txBody>
-          <a:bodyPr/>
-          <a:lstStyle/>
-          <a:p>
-            <a:r>
-              <a:t>LLM e Explicabilidade</a:t>
+              <a:t>Conclusao</a:t>
             </a:r>
           </a:p>
         </p:txBody>
@@ -3930,7 +3737,7 @@
               <a:defRPr sz="2200"/>
             </a:pPr>
             <a:r>
-              <a:t>Camada desacoplada com suporte a mock e endpoint HTTP.</a:t>
+              <a:t>O estudo comparou 4 modelos baseline e 12 execucoes de AG.</a:t>
             </a:r>
           </a:p>
           <a:p>
@@ -3938,7 +3745,7 @@
               <a:defRPr sz="2200"/>
             </a:pPr>
             <a:r>
-              <a:t>Explicacoes com classificacao, probabilidade, cautela clinica e aviso de nao substituicao da avaliacao medica.</a:t>
+              <a:t>O maior ganho de recall foi do KNN, com 2,38 p.p.</a:t>
             </a:r>
           </a:p>
           <a:p>
@@ -3946,165 +3753,15 @@
               <a:defRPr sz="2200"/>
             </a:pPr>
             <a:r>
-              <a:t>Persistencia automatica das respostas em JSONL.</a:t>
-            </a:r>
-          </a:p>
-        </p:txBody>
-      </p:sp>
-    </p:spTree>
-  </p:cSld>
-  <p:clrMapOvr>
-    <a:masterClrMapping/>
-  </p:clrMapOvr>
-</p:sld>
-</file>
-
-<file path=ppt/slides/slide18.xml><?xml version="1.0" encoding="utf-8"?>
-<p:sld xmlns:a="http://schemas.openxmlformats.org/drawingml/2006/main" xmlns:p="http://schemas.openxmlformats.org/presentationml/2006/main" xmlns:r="http://schemas.openxmlformats.org/officeDocument/2006/relationships">
-  <p:cSld>
-    <p:spTree>
-      <p:nvGrpSpPr>
-        <p:cNvPr id="1" name=""/>
-        <p:cNvGrpSpPr/>
-        <p:nvPr/>
-      </p:nvGrpSpPr>
-      <p:grpSpPr/>
-      <p:sp>
-        <p:nvSpPr>
-          <p:cNvPr id="2" name="Title 1"/>
-          <p:cNvSpPr>
-            <a:spLocks noGrp="1"/>
-          </p:cNvSpPr>
-          <p:nvPr>
-            <p:ph type="title"/>
-          </p:nvPr>
-        </p:nvSpPr>
-        <p:spPr/>
-        <p:txBody>
-          <a:bodyPr/>
-          <a:lstStyle/>
-          <a:p>
-            <a:r>
-              <a:t>Interface Web</a:t>
-            </a:r>
-          </a:p>
-        </p:txBody>
-      </p:sp>
-      <p:sp>
-        <p:nvSpPr>
-          <p:cNvPr id="3" name="Content Placeholder 2"/>
-          <p:cNvSpPr>
-            <a:spLocks noGrp="1"/>
-          </p:cNvSpPr>
-          <p:nvPr>
-            <p:ph idx="1"/>
-          </p:nvPr>
-        </p:nvSpPr>
-        <p:spPr/>
-        <p:txBody>
-          <a:bodyPr/>
-          <a:lstStyle/>
+              <a:t>A melhor recomendacao final permaneceu em LogisticRegression.</a:t>
+            </a:r>
+          </a:p>
           <a:p>
             <a:pPr>
               <a:defRPr sz="2200"/>
             </a:pPr>
             <a:r>
-              <a:t>Metricas, graficos e monitoramento.</a:t>
-            </a:r>
-          </a:p>
-          <a:p>
-            <a:pPr>
-              <a:defRPr sz="2200"/>
-            </a:pPr>
-            <a:r>
-              <a:t>Upload de CSV e simulacao de predicao.</a:t>
-            </a:r>
-          </a:p>
-          <a:p>
-            <a:pPr>
-              <a:defRPr sz="2200"/>
-            </a:pPr>
-            <a:r>
-              <a:t>Historico da LLM e comparacao entre baselines e familia otimizada.</a:t>
-            </a:r>
-          </a:p>
-        </p:txBody>
-      </p:sp>
-    </p:spTree>
-  </p:cSld>
-  <p:clrMapOvr>
-    <a:masterClrMapping/>
-  </p:clrMapOvr>
-</p:sld>
-</file>
-
-<file path=ppt/slides/slide19.xml><?xml version="1.0" encoding="utf-8"?>
-<p:sld xmlns:a="http://schemas.openxmlformats.org/drawingml/2006/main" xmlns:p="http://schemas.openxmlformats.org/presentationml/2006/main" xmlns:r="http://schemas.openxmlformats.org/officeDocument/2006/relationships">
-  <p:cSld>
-    <p:spTree>
-      <p:nvGrpSpPr>
-        <p:cNvPr id="1" name=""/>
-        <p:cNvGrpSpPr/>
-        <p:nvPr/>
-      </p:nvGrpSpPr>
-      <p:grpSpPr/>
-      <p:sp>
-        <p:nvSpPr>
-          <p:cNvPr id="2" name="Title 1"/>
-          <p:cNvSpPr>
-            <a:spLocks noGrp="1"/>
-          </p:cNvSpPr>
-          <p:nvPr>
-            <p:ph type="title"/>
-          </p:nvPr>
-        </p:nvSpPr>
-        <p:spPr/>
-        <p:txBody>
-          <a:bodyPr/>
-          <a:lstStyle/>
-          <a:p>
-            <a:r>
-              <a:t>API, Logging e Nuvem</a:t>
-            </a:r>
-          </a:p>
-        </p:txBody>
-      </p:sp>
-      <p:sp>
-        <p:nvSpPr>
-          <p:cNvPr id="3" name="Content Placeholder 2"/>
-          <p:cNvSpPr>
-            <a:spLocks noGrp="1"/>
-          </p:cNvSpPr>
-          <p:nvPr>
-            <p:ph idx="1"/>
-          </p:nvPr>
-        </p:nvSpPr>
-        <p:spPr/>
-        <p:txBody>
-          <a:bodyPr/>
-          <a:lstStyle/>
-          <a:p>
-            <a:pPr>
-              <a:defRPr sz="2200"/>
-            </a:pPr>
-            <a:r>
-              <a:t>FastAPI pronta para integracoes futuras.</a:t>
-            </a:r>
-          </a:p>
-          <a:p>
-            <a:pPr>
-              <a:defRPr sz="2200"/>
-            </a:pPr>
-            <a:r>
-              <a:t>Logging em arquivo e aba de monitoramento.</a:t>
-            </a:r>
-          </a:p>
-          <a:p>
-            <a:pPr>
-              <a:defRPr sz="2200"/>
-            </a:pPr>
-            <a:r>
-              <a:t>Docker e Terraform inicial para nuvem.</a:t>
+              <a:t>O projeto ficou coerente com os resultados reais gerados pelo estudo.</a:t>
             </a:r>
           </a:p>
         </p:txBody>
@@ -4143,7 +3800,7 @@
           <a:lstStyle/>
           <a:p>
             <a:r>
-              <a:t>Problema e Objetivo</a:t>
+              <a:t>Objetivo do Estudo</a:t>
             </a:r>
           </a:p>
         </p:txBody>
@@ -4167,7 +3824,7 @@
               <a:defRPr sz="2200"/>
             </a:pPr>
             <a:r>
-              <a:t>Sistema de apoio ao diagnostico com foco na reducao de falsos negativos.</a:t>
+              <a:t>Comparar modelos baseline e modelos otimizados por Algoritmo Genetico.</a:t>
             </a:r>
           </a:p>
           <a:p>
@@ -4175,7 +3832,7 @@
               <a:defRPr sz="2200"/>
             </a:pPr>
             <a:r>
-              <a:t>Comparacao entre multiplos modelos baseline e otimizacao da familia vencedora pelo fitness.</a:t>
+              <a:t>Priorizar recall para reduzir falsos negativos em contexto clinico.</a:t>
             </a:r>
           </a:p>
           <a:p>
@@ -4183,173 +3840,7 @@
               <a:defRPr sz="2200"/>
             </a:pPr>
             <a:r>
-              <a:t>Explicabilidade em linguagem natural voltada ao contexto profissional.</a:t>
-            </a:r>
-          </a:p>
-        </p:txBody>
-      </p:sp>
-    </p:spTree>
-  </p:cSld>
-  <p:clrMapOvr>
-    <a:masterClrMapping/>
-  </p:clrMapOvr>
-</p:sld>
-</file>
-
-<file path=ppt/slides/slide20.xml><?xml version="1.0" encoding="utf-8"?>
-<p:sld xmlns:a="http://schemas.openxmlformats.org/drawingml/2006/main" xmlns:p="http://schemas.openxmlformats.org/presentationml/2006/main" xmlns:r="http://schemas.openxmlformats.org/officeDocument/2006/relationships">
-  <p:cSld>
-    <p:spTree>
-      <p:nvGrpSpPr>
-        <p:cNvPr id="1" name=""/>
-        <p:cNvGrpSpPr/>
-        <p:nvPr/>
-      </p:nvGrpSpPr>
-      <p:grpSpPr/>
-      <p:sp>
-        <p:nvSpPr>
-          <p:cNvPr id="2" name="Title 1"/>
-          <p:cNvSpPr>
-            <a:spLocks noGrp="1"/>
-          </p:cNvSpPr>
-          <p:nvPr>
-            <p:ph type="title"/>
-          </p:nvPr>
-        </p:nvSpPr>
-        <p:spPr/>
-        <p:txBody>
-          <a:bodyPr/>
-          <a:lstStyle/>
-          <a:p>
-            <a:r>
-              <a:t>Testes e Preparacao Futura</a:t>
-            </a:r>
-          </a:p>
-        </p:txBody>
-      </p:sp>
-      <p:sp>
-        <p:nvSpPr>
-          <p:cNvPr id="3" name="Content Placeholder 2"/>
-          <p:cNvSpPr>
-            <a:spLocks noGrp="1"/>
-          </p:cNvSpPr>
-          <p:nvPr>
-            <p:ph idx="1"/>
-          </p:nvPr>
-        </p:nvSpPr>
-        <p:spPr/>
-        <p:txBody>
-          <a:bodyPr/>
-          <a:lstStyle/>
-          <a:p>
-            <a:pPr>
-              <a:defRPr sz="2200"/>
-            </a:pPr>
-            <a:r>
-              <a:t>Cobertura para nucleo, integracao, UI e API.</a:t>
-            </a:r>
-          </a:p>
-          <a:p>
-            <a:pPr>
-              <a:defRPr sz="2200"/>
-            </a:pPr>
-            <a:r>
-              <a:t>Base modular para workers e servicos desacoplados.</a:t>
-            </a:r>
-          </a:p>
-          <a:p>
-            <a:pPr>
-              <a:defRPr sz="2200"/>
-            </a:pPr>
-            <a:r>
-              <a:t>Preparacao tecnica para a Fase 3.</a:t>
-            </a:r>
-          </a:p>
-        </p:txBody>
-      </p:sp>
-    </p:spTree>
-  </p:cSld>
-  <p:clrMapOvr>
-    <a:masterClrMapping/>
-  </p:clrMapOvr>
-</p:sld>
-</file>
-
-<file path=ppt/slides/slide21.xml><?xml version="1.0" encoding="utf-8"?>
-<p:sld xmlns:a="http://schemas.openxmlformats.org/drawingml/2006/main" xmlns:p="http://schemas.openxmlformats.org/presentationml/2006/main" xmlns:r="http://schemas.openxmlformats.org/officeDocument/2006/relationships">
-  <p:cSld>
-    <p:spTree>
-      <p:nvGrpSpPr>
-        <p:cNvPr id="1" name=""/>
-        <p:cNvGrpSpPr/>
-        <p:nvPr/>
-      </p:nvGrpSpPr>
-      <p:grpSpPr/>
-      <p:sp>
-        <p:nvSpPr>
-          <p:cNvPr id="2" name="Title 1"/>
-          <p:cNvSpPr>
-            <a:spLocks noGrp="1"/>
-          </p:cNvSpPr>
-          <p:nvPr>
-            <p:ph type="title"/>
-          </p:nvPr>
-        </p:nvSpPr>
-        <p:spPr/>
-        <p:txBody>
-          <a:bodyPr/>
-          <a:lstStyle/>
-          <a:p>
-            <a:r>
-              <a:t>Conclusoes</a:t>
-            </a:r>
-          </a:p>
-        </p:txBody>
-      </p:sp>
-      <p:sp>
-        <p:nvSpPr>
-          <p:cNvPr id="3" name="Content Placeholder 2"/>
-          <p:cNvSpPr>
-            <a:spLocks noGrp="1"/>
-          </p:cNvSpPr>
-          <p:nvPr>
-            <p:ph idx="1"/>
-          </p:nvPr>
-        </p:nvSpPr>
-        <p:spPr/>
-        <p:txBody>
-          <a:bodyPr/>
-          <a:lstStyle/>
-          <a:p>
-            <a:pPr>
-              <a:defRPr sz="2200"/>
-            </a:pPr>
-            <a:r>
-              <a:t>A comparacao entre quatro baselines ampliou a robustez do estudo.</a:t>
-            </a:r>
-          </a:p>
-          <a:p>
-            <a:pPr>
-              <a:defRPr sz="2200"/>
-            </a:pPr>
-            <a:r>
-              <a:t>A LogisticRegression foi selecionada como referencia pelo fitness.</a:t>
-            </a:r>
-          </a:p>
-          <a:p>
-            <a:pPr>
-              <a:defRPr sz="2200"/>
-            </a:pPr>
-            <a:r>
-              <a:t>O AG melhorou o desempenho dessa mesma familia no conjunto de teste.</a:t>
-            </a:r>
-          </a:p>
-          <a:p>
-            <a:pPr>
-              <a:defRPr sz="2200"/>
-            </a:pPr>
-            <a:r>
-              <a:t>Projeto completo, testado e pronto para evolucao.</a:t>
+              <a:t>Analisar trade-offs entre recall, especificidade e F1-score.</a:t>
             </a:r>
           </a:p>
         </p:txBody>
@@ -4388,7 +3879,7 @@
           <a:lstStyle/>
           <a:p>
             <a:r>
-              <a:t>Dataset Utilizado</a:t>
+              <a:t>Dataset e Preparacao</a:t>
             </a:r>
           </a:p>
         </p:txBody>
@@ -4412,7 +3903,7 @@
               <a:defRPr sz="2200"/>
             </a:pPr>
             <a:r>
-              <a:t>Breast Cancer Wisconsin Diagnostic.</a:t>
+              <a:t>Breast Cancer Wisconsin Diagnostic, com 569 amostras.</a:t>
             </a:r>
           </a:p>
           <a:p>
@@ -4420,7 +3911,7 @@
               <a:defRPr sz="2200"/>
             </a:pPr>
             <a:r>
-              <a:t>569 amostras em um problema de classificacao binaria.</a:t>
+              <a:t>Split estratificado: 455 em treino e 114 em teste.</a:t>
             </a:r>
           </a:p>
           <a:p>
@@ -4428,7 +3919,7 @@
               <a:defRPr sz="2200"/>
             </a:pPr>
             <a:r>
-              <a:t>Classe positiva ajustada para malignidade.</a:t>
+              <a:t>Normalizacao com StandardScaler e classe positiva igual a malignidade.</a:t>
             </a:r>
           </a:p>
         </p:txBody>
@@ -4467,7 +3958,7 @@
           <a:lstStyle/>
           <a:p>
             <a:r>
-              <a:t>Arquitetura da Solucao</a:t>
+              <a:t>Modelos Avaliados</a:t>
             </a:r>
           </a:p>
         </p:txBody>
@@ -4491,7 +3982,7 @@
               <a:defRPr sz="2200"/>
             </a:pPr>
             <a:r>
-              <a:t>Separacao entre dominio, interface, API e camada de experimentacao.</a:t>
+              <a:t>KNeighborsClassifier</a:t>
             </a:r>
           </a:p>
           <a:p>
@@ -4499,7 +3990,7 @@
               <a:defRPr sz="2200"/>
             </a:pPr>
             <a:r>
-              <a:t>Entradas principais: pipeline, AG, Streamlit e API.</a:t>
+              <a:t>DecisionTreeClassifier</a:t>
             </a:r>
           </a:p>
           <a:p>
@@ -4507,7 +3998,15 @@
               <a:defRPr sz="2200"/>
             </a:pPr>
             <a:r>
-              <a:t>Saidas: JSON, JSONL, graficos, logs e modelo exportado.</a:t>
+              <a:t>LogisticRegression</a:t>
+            </a:r>
+          </a:p>
+          <a:p>
+            <a:pPr>
+              <a:defRPr sz="2200"/>
+            </a:pPr>
+            <a:r>
+              <a:t>RandomForestClassifier</a:t>
             </a:r>
           </a:p>
         </p:txBody>
@@ -4546,7 +4045,7 @@
           <a:lstStyle/>
           <a:p>
             <a:r>
-              <a:t>Algoritmo Genetico</a:t>
+              <a:t>Configuracao do AG</a:t>
             </a:r>
           </a:p>
         </p:txBody>
@@ -4570,7 +4069,7 @@
               <a:defRPr sz="2200"/>
             </a:pPr>
             <a:r>
-              <a:t>Genes representando hiperparametros de LogisticRegression.</a:t>
+              <a:t>Fitness = 0,6 x recall + 0,3 x F1-score + 0,1 x especificidade.</a:t>
             </a:r>
           </a:p>
           <a:p>
@@ -4578,7 +4077,7 @@
               <a:defRPr sz="2200"/>
             </a:pPr>
             <a:r>
-              <a:t>Selecao, crossover, mutacao e elitismo.</a:t>
+              <a:t>Selecao por torneio, crossover, mutacao e elitismo.</a:t>
             </a:r>
           </a:p>
           <a:p>
@@ -4586,7 +4085,7 @@
               <a:defRPr sz="2200"/>
             </a:pPr>
             <a:r>
-              <a:t>Fitness: 55% recall, 25% especificidade, 20% F1.</a:t>
+              <a:t>3 experimentos por modelo: exploracao, equilibrio e refinamento.</a:t>
             </a:r>
           </a:p>
         </p:txBody>
@@ -4625,7 +4124,7 @@
           <a:lstStyle/>
           <a:p>
             <a:r>
-              <a:t>Experimentos</a:t>
+              <a:t>Baselines no Teste</a:t>
             </a:r>
           </a:p>
         </p:txBody>
@@ -4656,7 +4155,7 @@
               <a:defRPr b="1" sz="2400"/>
             </a:pPr>
             <a:r>
-              <a:t>Configuracoes testadas</a:t>
+              <a:t>Melhores sinais</a:t>
             </a:r>
           </a:p>
           <a:p>
@@ -4664,7 +4163,7 @@
               <a:defRPr sz="1800"/>
             </a:pPr>
             <a:r>
-              <a:t>Exp. 1: pop. 6 | 3 geracoes | mut. 0,10</a:t>
+              <a:t>LogisticRegression: recall 95,24%</a:t>
             </a:r>
           </a:p>
           <a:p>
@@ -4672,7 +4171,7 @@
               <a:defRPr sz="1800"/>
             </a:pPr>
             <a:r>
-              <a:t>Exp. 2: pop. 8 | 4 geracoes | mut. 0,15</a:t>
+              <a:t>RandomForest: especificidade 100,00%</a:t>
             </a:r>
           </a:p>
           <a:p>
@@ -4680,7 +4179,7 @@
               <a:defRPr sz="1800"/>
             </a:pPr>
             <a:r>
-              <a:t>Exp. 3: pop. 10 | 5 geracoes | mut. 0,20</a:t>
+              <a:t>KNN: F1 93,83%</a:t>
             </a:r>
           </a:p>
         </p:txBody>
@@ -4711,7 +4210,7 @@
               <a:defRPr b="1" sz="2400"/>
             </a:pPr>
             <a:r>
-              <a:t>Camadas adicionais</a:t>
+              <a:t>Leitura inicial</a:t>
             </a:r>
           </a:p>
           <a:p>
@@ -4719,7 +4218,7 @@
               <a:defRPr sz="1800"/>
             </a:pPr>
             <a:r>
-              <a:t>Script dedicado para AG.</a:t>
+              <a:t>LogisticRegression foi o baseline mais forte no conjunto de teste.</a:t>
             </a:r>
           </a:p>
           <a:p>
@@ -4727,7 +4226,7 @@
               <a:defRPr sz="1800"/>
             </a:pPr>
             <a:r>
-              <a:t>Geracao automatica de graficos.</a:t>
+              <a:t>RandomForest teve baseline robusto, mas nao foi o melhor em recall.</a:t>
             </a:r>
           </a:p>
           <a:p>
@@ -4735,7 +4234,7 @@
               <a:defRPr sz="1800"/>
             </a:pPr>
             <a:r>
-              <a:t>UI, API, logging, Docker e Terraform.</a:t>
+              <a:t>DecisionTree foi a familia menos equilibrada na partida.</a:t>
             </a:r>
           </a:p>
         </p:txBody>
@@ -4774,7 +4273,7 @@
           <a:lstStyle/>
           <a:p>
             <a:r>
-              <a:t>Comparacao de Baselines</a:t>
+              <a:t>Resultado Final por Modelo</a:t>
             </a:r>
           </a:p>
         </p:txBody>
@@ -4805,7 +4304,7 @@
               <a:defRPr b="1" sz="2400"/>
             </a:pPr>
             <a:r>
-              <a:t>Modelos avaliados</a:t>
+              <a:t>Maior ganho de recall</a:t>
             </a:r>
           </a:p>
           <a:p>
@@ -4813,7 +4312,7 @@
               <a:defRPr sz="1800"/>
             </a:pPr>
             <a:r>
-              <a:t>RandomForestClassifier</a:t>
+              <a:t>Modelo: KNeighborsClassifier</a:t>
             </a:r>
           </a:p>
           <a:p>
@@ -4821,7 +4320,7 @@
               <a:defRPr sz="1800"/>
             </a:pPr>
             <a:r>
-              <a:t>LogisticRegression</a:t>
+              <a:t>Recall baseline: 90,48%</a:t>
             </a:r>
           </a:p>
           <a:p>
@@ -4829,7 +4328,7 @@
               <a:defRPr sz="1800"/>
             </a:pPr>
             <a:r>
-              <a:t>DecisionTreeClassifier</a:t>
+              <a:t>Recall otimizado: 92,86%</a:t>
             </a:r>
           </a:p>
           <a:p>
@@ -4837,7 +4336,7 @@
               <a:defRPr sz="1800"/>
             </a:pPr>
             <a:r>
-              <a:t>KNeighborsClassifier</a:t>
+              <a:t>Delta: 2,38 p.p.</a:t>
             </a:r>
           </a:p>
         </p:txBody>
@@ -4868,7 +4367,7 @@
               <a:defRPr b="1" sz="2400"/>
             </a:pPr>
             <a:r>
-              <a:t>Melhor baseline em teste</a:t>
+              <a:t>Melhor equilibrio geral</a:t>
             </a:r>
           </a:p>
           <a:p>
@@ -4884,7 +4383,7 @@
               <a:defRPr sz="1800"/>
             </a:pPr>
             <a:r>
-              <a:t>Recall: 95.24%</a:t>
+              <a:t>Recall: 95,24%</a:t>
             </a:r>
           </a:p>
           <a:p>
@@ -4892,7 +4391,7 @@
               <a:defRPr sz="1800"/>
             </a:pPr>
             <a:r>
-              <a:t>Especificidade: 98.61%</a:t>
+              <a:t>Especificidade: 98,61%</a:t>
             </a:r>
           </a:p>
           <a:p>
@@ -4900,7 +4399,7 @@
               <a:defRPr sz="1800"/>
             </a:pPr>
             <a:r>
-              <a:t>F1-score: 96.39%</a:t>
+              <a:t>F1-score: 96,39%</a:t>
             </a:r>
           </a:p>
         </p:txBody>
@@ -4939,7 +4438,7 @@
           <a:lstStyle/>
           <a:p>
             <a:r>
-              <a:t>Baseline de Referencia do AG</a:t>
+              <a:t>Melhores Experimentos</a:t>
             </a:r>
           </a:p>
         </p:txBody>
@@ -4970,7 +4469,7 @@
               <a:defRPr b="1" sz="2400"/>
             </a:pPr>
             <a:r>
-              <a:t>LogisticRegression base</a:t>
+              <a:t>KNN e Decision Tree</a:t>
             </a:r>
           </a:p>
           <a:p>
@@ -4978,7 +4477,7 @@
               <a:defRPr sz="1800"/>
             </a:pPr>
             <a:r>
-              <a:t>Recall: 95.24%</a:t>
+              <a:t>KNN: experimento_1_exploracao</a:t>
             </a:r>
           </a:p>
           <a:p>
@@ -4986,7 +4485,7 @@
               <a:defRPr sz="1800"/>
             </a:pPr>
             <a:r>
-              <a:t>Especificidade: 98.61%</a:t>
+              <a:t>n_neighbors = 2</a:t>
             </a:r>
           </a:p>
           <a:p>
@@ -4994,7 +4493,7 @@
               <a:defRPr sz="1800"/>
             </a:pPr>
             <a:r>
-              <a:t>F1-score: 96.39%</a:t>
+              <a:t>weights = distance</a:t>
             </a:r>
           </a:p>
           <a:p>
@@ -5002,7 +4501,15 @@
               <a:defRPr sz="1800"/>
             </a:pPr>
             <a:r>
-              <a:t>Acuracia: 97.37%</a:t>
+              <a:t>p = 1</a:t>
+            </a:r>
+          </a:p>
+          <a:p>
+            <a:pPr>
+              <a:defRPr sz="1800"/>
+            </a:pPr>
+            <a:r>
+              <a:t>Recall final = 92,86%</a:t>
             </a:r>
           </a:p>
         </p:txBody>
@@ -5033,7 +4540,7 @@
               <a:defRPr b="1" sz="2400"/>
             </a:pPr>
             <a:r>
-              <a:t>Leitura tecnica</a:t>
+              <a:t>LogReg e Random Forest</a:t>
             </a:r>
           </a:p>
           <a:p>
@@ -5041,7 +4548,7 @@
               <a:defRPr sz="1800"/>
             </a:pPr>
             <a:r>
-              <a:t>A familia de referencia foi escolhida automaticamente pelo fitness.</a:t>
+              <a:t>LogReg: experimento_1_exploracao</a:t>
             </a:r>
           </a:p>
           <a:p>
@@ -5049,7 +4556,7 @@
               <a:defRPr sz="1800"/>
             </a:pPr>
             <a:r>
-              <a:t>Modelo selecionado: LogisticRegression.</a:t>
+              <a:t>C = 7.5 | max_iter = 600 | solver = liblinear</a:t>
             </a:r>
           </a:p>
           <a:p>
@@ -5057,7 +4564,23 @@
               <a:defRPr sz="1800"/>
             </a:pPr>
             <a:r>
-              <a:t>A comparacao com outros baselines reforca a coerencia da busca evolutiva.</a:t>
+              <a:t>RF: experimento_1_exploracao</a:t>
+            </a:r>
+          </a:p>
+          <a:p>
+            <a:pPr>
+              <a:defRPr sz="1800"/>
+            </a:pPr>
+            <a:r>
+              <a:t>n_estimators = 400 | max_depth = 30</a:t>
+            </a:r>
+          </a:p>
+          <a:p>
+            <a:pPr>
+              <a:defRPr sz="1800"/>
+            </a:pPr>
+            <a:r>
+              <a:t>min_samples_split = 42 | min_samples_leaf = 3</a:t>
             </a:r>
           </a:p>
         </p:txBody>
@@ -5096,7 +4619,7 @@
           <a:lstStyle/>
           <a:p>
             <a:r>
-              <a:t>Melhores Configuracoes do AG</a:t>
+              <a:t>Trade-offs Observados</a:t>
             </a:r>
           </a:p>
         </p:txBody>
@@ -5127,7 +4650,7 @@
               <a:defRPr b="1" sz="2400"/>
             </a:pPr>
             <a:r>
-              <a:t>Experimento 1</a:t>
+              <a:t>Ganhos</a:t>
             </a:r>
           </a:p>
           <a:p>
@@ -5135,7 +4658,7 @@
               <a:defRPr sz="1800"/>
             </a:pPr>
             <a:r>
-              <a:t>classifier__C = 0.1</a:t>
+              <a:t>KNN aumentou o recall em 2,38 p.p.</a:t>
             </a:r>
           </a:p>
           <a:p>
@@ -5143,7 +4666,7 @@
               <a:defRPr sz="1800"/>
             </a:pPr>
             <a:r>
-              <a:t>classifier__solver = lbfgs</a:t>
+              <a:t>DecisionTree aumentou a especificidade.</a:t>
             </a:r>
           </a:p>
           <a:p>
@@ -5151,15 +4674,7 @@
               <a:defRPr sz="1800"/>
             </a:pPr>
             <a:r>
-              <a:t>scaler__with_mean = True</a:t>
-            </a:r>
-          </a:p>
-          <a:p>
-            <a:pPr>
-              <a:defRPr sz="1800"/>
-            </a:pPr>
-            <a:r>
-              <a:t>scaler__with_std = True</a:t>
+              <a:t>LogisticRegression manteve o melhor equilibrio geral.</a:t>
             </a:r>
           </a:p>
         </p:txBody>
@@ -5190,7 +4705,7 @@
               <a:defRPr b="1" sz="2400"/>
             </a:pPr>
             <a:r>
-              <a:t>Experimento 2</a:t>
+              <a:t>Perdas</a:t>
             </a:r>
           </a:p>
           <a:p>
@@ -5198,7 +4713,7 @@
               <a:defRPr sz="1800"/>
             </a:pPr>
             <a:r>
-              <a:t>classifier__C = 0.1</a:t>
+              <a:t>KNN perdeu especificidade e F1.</a:t>
             </a:r>
           </a:p>
           <a:p>
@@ -5206,7 +4721,7 @@
               <a:defRPr sz="1800"/>
             </a:pPr>
             <a:r>
-              <a:t>classifier__solver = lbfgs</a:t>
+              <a:t>DecisionTree perdeu recall.</a:t>
             </a:r>
           </a:p>
           <a:p>
@@ -5214,23 +4729,7 @@
               <a:defRPr sz="1800"/>
             </a:pPr>
             <a:r>
-              <a:t>scaler__with_mean = True</a:t>
-            </a:r>
-          </a:p>
-          <a:p>
-            <a:pPr>
-              <a:defRPr sz="1800"/>
-            </a:pPr>
-            <a:r>
-              <a:t>scaler__with_std = True</a:t>
-            </a:r>
-          </a:p>
-          <a:p>
-            <a:pPr>
-              <a:defRPr sz="1800"/>
-            </a:pPr>
-            <a:r>
-              <a:t>F1 teste = 98.80%</a:t>
+              <a:t>RandomForest perdeu recall e F1 no teste.</a:t>
             </a:r>
           </a:p>
         </p:txBody>
